--- a/ゲーム科3年/00_前期/プロジェクトワーク/00_卒業研究.pptx
+++ b/ゲーム科3年/00_前期/プロジェクトワーク/00_卒業研究.pptx
@@ -7,6 +7,9 @@
   <p:sldIdLst>
     <p:sldId id="256" r:id="rId2"/>
     <p:sldId id="257" r:id="rId3"/>
+    <p:sldId id="258" r:id="rId4"/>
+    <p:sldId id="259" r:id="rId5"/>
+    <p:sldId id="260" r:id="rId6"/>
   </p:sldIdLst>
   <p:sldSz cx="12192000" cy="6858000"/>
   <p:notesSz cx="6858000" cy="9144000"/>
@@ -3665,7 +3668,7 @@
         <p:spPr>
           <a:xfrm>
             <a:off x="567542" y="1216429"/>
-            <a:ext cx="7263527" cy="3785652"/>
+            <a:ext cx="7263527" cy="4893647"/>
           </a:xfrm>
           <a:prstGeom prst="rect">
             <a:avLst/>
@@ -3680,7 +3683,7 @@
           <a:p>
             <a:r>
               <a:rPr kumimoji="1" lang="ja-JP" altLang="en-US" sz="2400" dirty="0"/>
-              <a:t>学校生活の集大成となる卒業研究です。</a:t>
+              <a:t>集大成となる卒業研究制作です。</a:t>
             </a:r>
             <a:endParaRPr kumimoji="1" lang="en-US" altLang="ja-JP" sz="2400" dirty="0"/>
           </a:p>
@@ -3724,7 +3727,7 @@
             </a:r>
             <a:r>
               <a:rPr lang="en-US" altLang="ja-JP" sz="2400" dirty="0"/>
-              <a:t>Epic Game Store </a:t>
+              <a:t>Epic Games Store </a:t>
             </a:r>
             <a:r>
               <a:rPr lang="ja-JP" altLang="en-US" sz="2400" dirty="0"/>
@@ -3737,6 +3740,17 @@
             <a:r>
               <a:rPr lang="ja-JP" altLang="en-US" sz="2400" dirty="0"/>
               <a:t>で作る場合）</a:t>
+            </a:r>
+            <a:endParaRPr lang="en-US" altLang="ja-JP" sz="2400" dirty="0"/>
+          </a:p>
+          <a:p>
+            <a:r>
+              <a:rPr lang="en-US" altLang="ja-JP" sz="2400" dirty="0"/>
+              <a:t>※</a:t>
+            </a:r>
+            <a:r>
+              <a:rPr lang="ja-JP" altLang="en-US" sz="2400" dirty="0"/>
+              <a:t>有料でもいいよ</a:t>
             </a:r>
             <a:endParaRPr lang="en-US" altLang="ja-JP" sz="2400" dirty="0"/>
           </a:p>
@@ -3770,6 +3784,20 @@
             <a:r>
               <a:rPr lang="ja-JP" altLang="en-US" sz="2400" dirty="0"/>
               <a:t>で販売</a:t>
+            </a:r>
+            <a:endParaRPr lang="en-US" altLang="ja-JP" sz="2400" dirty="0"/>
+          </a:p>
+          <a:p>
+            <a:r>
+              <a:rPr lang="ja-JP" altLang="en-US" sz="2400" dirty="0"/>
+              <a:t>　・開発機が必要だったりでハードルは高い</a:t>
+            </a:r>
+            <a:endParaRPr lang="en-US" altLang="ja-JP" sz="2400" dirty="0"/>
+          </a:p>
+          <a:p>
+            <a:r>
+              <a:rPr lang="ja-JP" altLang="en-US" sz="2400" dirty="0"/>
+              <a:t>　・卒業後も引き継いで目指してみるのもあり</a:t>
             </a:r>
             <a:endParaRPr lang="en-US" altLang="ja-JP" sz="2400" dirty="0"/>
           </a:p>
@@ -3888,7 +3916,7 @@
           <a:p>
             <a:r>
               <a:rPr lang="ja-JP" altLang="en-US" sz="2400" dirty="0"/>
-              <a:t>今回も長期制作になります。</a:t>
+              <a:t>長期制作になります。</a:t>
             </a:r>
             <a:endParaRPr lang="en-US" altLang="ja-JP" sz="2400" dirty="0"/>
           </a:p>
@@ -3954,7 +3982,7 @@
           <a:p>
             <a:r>
               <a:rPr lang="ja-JP" altLang="en-US" sz="2400" dirty="0"/>
-              <a:t>計画を立てやすくしたり、プロジェクトを軌道修正しやすくする方法。</a:t>
+              <a:t>計画を立てやすくしたり、プロジェクトを軌道修正しやすくする。</a:t>
             </a:r>
             <a:endParaRPr lang="en-US" altLang="ja-JP" sz="2400" dirty="0"/>
           </a:p>
@@ -3964,6 +3992,698 @@
     <p:extLst>
       <p:ext uri="{BB962C8B-B14F-4D97-AF65-F5344CB8AC3E}">
         <p14:creationId xmlns:p14="http://schemas.microsoft.com/office/powerpoint/2010/main" val="104352390"/>
+      </p:ext>
+    </p:extLst>
+  </p:cSld>
+  <p:clrMapOvr>
+    <a:masterClrMapping/>
+  </p:clrMapOvr>
+</p:sld>
+</file>
+
+<file path=ppt/slides/slide3.xml><?xml version="1.0" encoding="utf-8"?>
+<p:sld xmlns:a="http://schemas.openxmlformats.org/drawingml/2006/main" xmlns:r="http://schemas.openxmlformats.org/officeDocument/2006/relationships" xmlns:p="http://schemas.openxmlformats.org/presentationml/2006/main">
+  <p:cSld>
+    <p:spTree>
+      <p:nvGrpSpPr>
+        <p:cNvPr id="1" name=""/>
+        <p:cNvGrpSpPr/>
+        <p:nvPr/>
+      </p:nvGrpSpPr>
+      <p:grpSpPr>
+        <a:xfrm>
+          <a:off x="0" y="0"/>
+          <a:ext cx="0" cy="0"/>
+          <a:chOff x="0" y="0"/>
+          <a:chExt cx="0" cy="0"/>
+        </a:xfrm>
+      </p:grpSpPr>
+      <p:sp>
+        <p:nvSpPr>
+          <p:cNvPr id="4" name="テキスト ボックス 3">
+            <a:extLst>
+              <a:ext uri="{FF2B5EF4-FFF2-40B4-BE49-F238E27FC236}">
+                <a16:creationId xmlns:a16="http://schemas.microsoft.com/office/drawing/2014/main" id="{5A13BF46-B8C5-48AA-8308-C9ECFF431A18}"/>
+              </a:ext>
+            </a:extLst>
+          </p:cNvPr>
+          <p:cNvSpPr txBox="1"/>
+          <p:nvPr/>
+        </p:nvSpPr>
+        <p:spPr>
+          <a:xfrm>
+            <a:off x="567542" y="491954"/>
+            <a:ext cx="3174267" cy="584775"/>
+          </a:xfrm>
+          <a:prstGeom prst="rect">
+            <a:avLst/>
+          </a:prstGeom>
+          <a:noFill/>
+        </p:spPr>
+        <p:txBody>
+          <a:bodyPr wrap="none" rtlCol="0">
+            <a:spAutoFit/>
+          </a:bodyPr>
+          <a:lstStyle/>
+          <a:p>
+            <a:r>
+              <a:rPr kumimoji="1" lang="ja-JP" altLang="en-US" sz="3200" b="1" u="sng" dirty="0"/>
+              <a:t>卒業研究 進め方</a:t>
+            </a:r>
+          </a:p>
+        </p:txBody>
+      </p:sp>
+      <p:sp>
+        <p:nvSpPr>
+          <p:cNvPr id="6" name="テキスト ボックス 5">
+            <a:extLst>
+              <a:ext uri="{FF2B5EF4-FFF2-40B4-BE49-F238E27FC236}">
+                <a16:creationId xmlns:a16="http://schemas.microsoft.com/office/drawing/2014/main" id="{55830AD6-028B-4C4E-80BF-B70DFC1C3A46}"/>
+              </a:ext>
+            </a:extLst>
+          </p:cNvPr>
+          <p:cNvSpPr txBox="1"/>
+          <p:nvPr/>
+        </p:nvSpPr>
+        <p:spPr>
+          <a:xfrm>
+            <a:off x="567542" y="1216429"/>
+            <a:ext cx="9417963" cy="4893647"/>
+          </a:xfrm>
+          <a:prstGeom prst="rect">
+            <a:avLst/>
+          </a:prstGeom>
+          <a:noFill/>
+        </p:spPr>
+        <p:txBody>
+          <a:bodyPr wrap="none" rtlCol="0">
+            <a:spAutoFit/>
+          </a:bodyPr>
+          <a:lstStyle/>
+          <a:p>
+            <a:r>
+              <a:rPr lang="ja-JP" altLang="en-US" sz="2400" b="1" dirty="0">
+                <a:solidFill>
+                  <a:srgbClr val="FF0000"/>
+                </a:solidFill>
+              </a:rPr>
+              <a:t>■スケジュール</a:t>
+            </a:r>
+            <a:endParaRPr lang="en-US" altLang="ja-JP" sz="2400" b="1" dirty="0">
+              <a:solidFill>
+                <a:srgbClr val="FF0000"/>
+              </a:solidFill>
+            </a:endParaRPr>
+          </a:p>
+          <a:p>
+            <a:r>
+              <a:rPr lang="ja-JP" altLang="en-US" sz="2400" dirty="0"/>
+              <a:t>・</a:t>
+            </a:r>
+            <a:r>
+              <a:rPr lang="en-US" altLang="ja-JP" sz="2400" dirty="0"/>
+              <a:t>5/22	</a:t>
+            </a:r>
+            <a:r>
+              <a:rPr lang="ja-JP" altLang="en-US" sz="2400" dirty="0"/>
+              <a:t>企画＆仕様完成</a:t>
+            </a:r>
+            <a:endParaRPr lang="en-US" altLang="ja-JP" sz="2400" dirty="0"/>
+          </a:p>
+          <a:p>
+            <a:r>
+              <a:rPr lang="ja-JP" altLang="en-US" sz="2400" dirty="0"/>
+              <a:t>・</a:t>
+            </a:r>
+            <a:r>
+              <a:rPr lang="en-US" altLang="ja-JP" sz="2400" dirty="0"/>
+              <a:t>6/30	</a:t>
+            </a:r>
+            <a:r>
+              <a:rPr lang="ja-JP" altLang="en-US" sz="2400" dirty="0"/>
+              <a:t>マイルストーン１</a:t>
+            </a:r>
+            <a:endParaRPr lang="en-US" altLang="ja-JP" sz="2400" dirty="0"/>
+          </a:p>
+          <a:p>
+            <a:r>
+              <a:rPr lang="ja-JP" altLang="en-US" sz="2400" dirty="0"/>
+              <a:t>・</a:t>
+            </a:r>
+            <a:r>
+              <a:rPr lang="en-US" altLang="ja-JP" sz="2400" dirty="0"/>
+              <a:t>9/30	</a:t>
+            </a:r>
+            <a:r>
+              <a:rPr lang="ja-JP" altLang="en-US" sz="2400" dirty="0"/>
+              <a:t>マイルストーン２</a:t>
+            </a:r>
+            <a:endParaRPr lang="en-US" altLang="ja-JP" sz="2400" dirty="0"/>
+          </a:p>
+          <a:p>
+            <a:r>
+              <a:rPr lang="ja-JP" altLang="en-US" sz="2400" dirty="0"/>
+              <a:t>・</a:t>
+            </a:r>
+            <a:r>
+              <a:rPr lang="en-US" altLang="ja-JP" sz="2400" dirty="0"/>
+              <a:t>10/30	</a:t>
+            </a:r>
+            <a:r>
+              <a:rPr lang="ja-JP" altLang="en-US" sz="2400" dirty="0"/>
+              <a:t>マイルストーン３</a:t>
+            </a:r>
+            <a:endParaRPr lang="en-US" altLang="ja-JP" sz="2400" dirty="0"/>
+          </a:p>
+          <a:p>
+            <a:r>
+              <a:rPr lang="ja-JP" altLang="en-US" sz="2400" dirty="0"/>
+              <a:t>・</a:t>
+            </a:r>
+            <a:r>
+              <a:rPr lang="en-US" altLang="ja-JP" sz="2400" dirty="0"/>
+              <a:t>1/15	β</a:t>
+            </a:r>
+            <a:r>
+              <a:rPr lang="ja-JP" altLang="en-US" sz="2400" dirty="0"/>
+              <a:t>版</a:t>
+            </a:r>
+            <a:endParaRPr lang="en-US" altLang="ja-JP" sz="2400" dirty="0"/>
+          </a:p>
+          <a:p>
+            <a:r>
+              <a:rPr lang="ja-JP" altLang="en-US" sz="2400" dirty="0"/>
+              <a:t>・</a:t>
+            </a:r>
+            <a:r>
+              <a:rPr lang="en-US" altLang="ja-JP" sz="2400" dirty="0"/>
+              <a:t>1/29	</a:t>
+            </a:r>
+            <a:r>
+              <a:rPr lang="ja-JP" altLang="en-US" sz="2400" dirty="0"/>
+              <a:t>マスターアップ</a:t>
+            </a:r>
+            <a:endParaRPr lang="en-US" altLang="ja-JP" sz="2400" dirty="0"/>
+          </a:p>
+          <a:p>
+            <a:endParaRPr lang="en-US" altLang="ja-JP" sz="2400" dirty="0"/>
+          </a:p>
+          <a:p>
+            <a:r>
+              <a:rPr lang="ja-JP" altLang="en-US" sz="2400" dirty="0"/>
+              <a:t>それぞれのマイルストーンで、</a:t>
+            </a:r>
+            <a:endParaRPr lang="en-US" altLang="ja-JP" sz="2400" dirty="0"/>
+          </a:p>
+          <a:p>
+            <a:r>
+              <a:rPr lang="ja-JP" altLang="en-US" sz="2400" dirty="0"/>
+              <a:t>ゲームがどこまでできているかをイメージしながら制作します。</a:t>
+            </a:r>
+            <a:endParaRPr lang="en-US" altLang="ja-JP" sz="2400" dirty="0"/>
+          </a:p>
+          <a:p>
+            <a:endParaRPr lang="en-US" altLang="ja-JP" sz="2400" dirty="0"/>
+          </a:p>
+          <a:p>
+            <a:r>
+              <a:rPr lang="en-US" altLang="ja-JP" sz="2400" dirty="0"/>
+              <a:t>※</a:t>
+            </a:r>
+            <a:r>
+              <a:rPr lang="ja-JP" altLang="en-US" sz="2400" dirty="0"/>
+              <a:t>発表会の日程次第では、終盤の予定を変更する可能性があります</a:t>
+            </a:r>
+            <a:endParaRPr lang="en-US" altLang="ja-JP" sz="2400" dirty="0"/>
+          </a:p>
+          <a:p>
+            <a:r>
+              <a:rPr lang="en-US" altLang="ja-JP" sz="2400" b="1" dirty="0">
+                <a:solidFill>
+                  <a:srgbClr val="FF0000"/>
+                </a:solidFill>
+              </a:rPr>
+              <a:t>※</a:t>
+            </a:r>
+            <a:r>
+              <a:rPr lang="ja-JP" altLang="en-US" sz="2400" b="1" dirty="0">
+                <a:solidFill>
+                  <a:srgbClr val="FF0000"/>
+                </a:solidFill>
+              </a:rPr>
+              <a:t>各マイルストーンの進捗度合いが成績に影響します</a:t>
+            </a:r>
+            <a:endParaRPr lang="en-US" altLang="ja-JP" sz="2400" b="1" dirty="0">
+              <a:solidFill>
+                <a:srgbClr val="FF0000"/>
+              </a:solidFill>
+            </a:endParaRPr>
+          </a:p>
+        </p:txBody>
+      </p:sp>
+    </p:spTree>
+    <p:extLst>
+      <p:ext uri="{BB962C8B-B14F-4D97-AF65-F5344CB8AC3E}">
+        <p14:creationId xmlns:p14="http://schemas.microsoft.com/office/powerpoint/2010/main" val="2994379750"/>
+      </p:ext>
+    </p:extLst>
+  </p:cSld>
+  <p:clrMapOvr>
+    <a:masterClrMapping/>
+  </p:clrMapOvr>
+</p:sld>
+</file>
+
+<file path=ppt/slides/slide4.xml><?xml version="1.0" encoding="utf-8"?>
+<p:sld xmlns:a="http://schemas.openxmlformats.org/drawingml/2006/main" xmlns:r="http://schemas.openxmlformats.org/officeDocument/2006/relationships" xmlns:p="http://schemas.openxmlformats.org/presentationml/2006/main">
+  <p:cSld>
+    <p:spTree>
+      <p:nvGrpSpPr>
+        <p:cNvPr id="1" name=""/>
+        <p:cNvGrpSpPr/>
+        <p:nvPr/>
+      </p:nvGrpSpPr>
+      <p:grpSpPr>
+        <a:xfrm>
+          <a:off x="0" y="0"/>
+          <a:ext cx="0" cy="0"/>
+          <a:chOff x="0" y="0"/>
+          <a:chExt cx="0" cy="0"/>
+        </a:xfrm>
+      </p:grpSpPr>
+      <p:sp>
+        <p:nvSpPr>
+          <p:cNvPr id="4" name="テキスト ボックス 3">
+            <a:extLst>
+              <a:ext uri="{FF2B5EF4-FFF2-40B4-BE49-F238E27FC236}">
+                <a16:creationId xmlns:a16="http://schemas.microsoft.com/office/drawing/2014/main" id="{5A13BF46-B8C5-48AA-8308-C9ECFF431A18}"/>
+              </a:ext>
+            </a:extLst>
+          </p:cNvPr>
+          <p:cNvSpPr txBox="1"/>
+          <p:nvPr/>
+        </p:nvSpPr>
+        <p:spPr>
+          <a:xfrm>
+            <a:off x="567542" y="491954"/>
+            <a:ext cx="2763898" cy="584775"/>
+          </a:xfrm>
+          <a:prstGeom prst="rect">
+            <a:avLst/>
+          </a:prstGeom>
+          <a:noFill/>
+        </p:spPr>
+        <p:txBody>
+          <a:bodyPr wrap="none" rtlCol="0">
+            <a:spAutoFit/>
+          </a:bodyPr>
+          <a:lstStyle/>
+          <a:p>
+            <a:r>
+              <a:rPr kumimoji="1" lang="ja-JP" altLang="en-US" sz="3200" b="1" u="sng" dirty="0"/>
+              <a:t>卒業研究 作品</a:t>
+            </a:r>
+          </a:p>
+        </p:txBody>
+      </p:sp>
+      <p:sp>
+        <p:nvSpPr>
+          <p:cNvPr id="6" name="テキスト ボックス 5">
+            <a:extLst>
+              <a:ext uri="{FF2B5EF4-FFF2-40B4-BE49-F238E27FC236}">
+                <a16:creationId xmlns:a16="http://schemas.microsoft.com/office/drawing/2014/main" id="{55830AD6-028B-4C4E-80BF-B70DFC1C3A46}"/>
+              </a:ext>
+            </a:extLst>
+          </p:cNvPr>
+          <p:cNvSpPr txBox="1"/>
+          <p:nvPr/>
+        </p:nvSpPr>
+        <p:spPr>
+          <a:xfrm>
+            <a:off x="567542" y="1216429"/>
+            <a:ext cx="7571303" cy="5262979"/>
+          </a:xfrm>
+          <a:prstGeom prst="rect">
+            <a:avLst/>
+          </a:prstGeom>
+          <a:noFill/>
+        </p:spPr>
+        <p:txBody>
+          <a:bodyPr wrap="none" rtlCol="0">
+            <a:spAutoFit/>
+          </a:bodyPr>
+          <a:lstStyle/>
+          <a:p>
+            <a:r>
+              <a:rPr lang="ja-JP" altLang="en-US" sz="2400" dirty="0"/>
+              <a:t>どのようなものを作るかは自由です。</a:t>
+            </a:r>
+            <a:endParaRPr lang="en-US" altLang="ja-JP" sz="2400" dirty="0"/>
+          </a:p>
+          <a:p>
+            <a:r>
+              <a:rPr lang="ja-JP" altLang="en-US" sz="2400" dirty="0"/>
+              <a:t>以下は規模の参考にしてください。</a:t>
+            </a:r>
+            <a:endParaRPr lang="en-US" altLang="ja-JP" sz="2400" dirty="0"/>
+          </a:p>
+          <a:p>
+            <a:endParaRPr lang="en-US" altLang="ja-JP" sz="2400" dirty="0"/>
+          </a:p>
+          <a:p>
+            <a:r>
+              <a:rPr lang="ja-JP" altLang="en-US" sz="2400" b="1" dirty="0">
+                <a:solidFill>
+                  <a:srgbClr val="FF0000"/>
+                </a:solidFill>
+              </a:rPr>
+              <a:t>■作品例</a:t>
+            </a:r>
+            <a:endParaRPr lang="en-US" altLang="ja-JP" sz="2400" b="1" dirty="0">
+              <a:solidFill>
+                <a:srgbClr val="FF0000"/>
+              </a:solidFill>
+            </a:endParaRPr>
+          </a:p>
+          <a:p>
+            <a:r>
+              <a:rPr lang="ja-JP" altLang="en-US" sz="2400" dirty="0"/>
+              <a:t>・複雑で本格的なものを作る場合</a:t>
+            </a:r>
+            <a:endParaRPr lang="en-US" altLang="ja-JP" sz="2400" dirty="0"/>
+          </a:p>
+          <a:p>
+            <a:r>
+              <a:rPr lang="ja-JP" altLang="en-US" sz="2400" dirty="0"/>
+              <a:t>　・アクション</a:t>
+            </a:r>
+            <a:endParaRPr lang="en-US" altLang="ja-JP" sz="2400" dirty="0"/>
+          </a:p>
+          <a:p>
+            <a:r>
+              <a:rPr lang="ja-JP" altLang="en-US" sz="2400" dirty="0"/>
+              <a:t>　　・</a:t>
+            </a:r>
+            <a:r>
+              <a:rPr lang="en-US" altLang="ja-JP" sz="2400" dirty="0"/>
+              <a:t>DMC</a:t>
+            </a:r>
+            <a:r>
+              <a:rPr lang="ja-JP" altLang="en-US" sz="2400" dirty="0"/>
+              <a:t>のようなコンボアクション</a:t>
+            </a:r>
+            <a:endParaRPr lang="en-US" altLang="ja-JP" sz="2400" dirty="0"/>
+          </a:p>
+          <a:p>
+            <a:r>
+              <a:rPr lang="ja-JP" altLang="en-US" sz="2400" dirty="0"/>
+              <a:t>　　・近代マリオのようなギミック豊富なアクション</a:t>
+            </a:r>
+            <a:endParaRPr lang="en-US" altLang="ja-JP" sz="2400" dirty="0"/>
+          </a:p>
+          <a:p>
+            <a:r>
+              <a:rPr lang="ja-JP" altLang="en-US" sz="2400" dirty="0"/>
+              <a:t>　・</a:t>
+            </a:r>
+            <a:r>
+              <a:rPr lang="en-US" altLang="ja-JP" sz="2400" dirty="0"/>
+              <a:t>RPG</a:t>
+            </a:r>
+          </a:p>
+          <a:p>
+            <a:r>
+              <a:rPr lang="ja-JP" altLang="en-US" sz="2400" dirty="0"/>
+              <a:t>　　・世界観、シナリオを重視</a:t>
+            </a:r>
+            <a:endParaRPr lang="en-US" altLang="ja-JP" sz="2400" dirty="0"/>
+          </a:p>
+          <a:p>
+            <a:r>
+              <a:rPr lang="ja-JP" altLang="en-US" sz="2400" dirty="0"/>
+              <a:t>　　・ジョブチェンジなど、独自システムも入れる</a:t>
+            </a:r>
+            <a:endParaRPr lang="en-US" altLang="ja-JP" sz="2400" dirty="0"/>
+          </a:p>
+          <a:p>
+            <a:endParaRPr lang="en-US" altLang="ja-JP" sz="2400" dirty="0"/>
+          </a:p>
+          <a:p>
+            <a:r>
+              <a:rPr lang="ja-JP" altLang="en-US" sz="2400" dirty="0"/>
+              <a:t>・シンプルなゲームを作る場合</a:t>
+            </a:r>
+            <a:endParaRPr lang="en-US" altLang="ja-JP" sz="2400" dirty="0"/>
+          </a:p>
+          <a:p>
+            <a:r>
+              <a:rPr lang="ja-JP" altLang="en-US" sz="2400" dirty="0"/>
+              <a:t>　・対戦、オンライン要素を入れる</a:t>
+            </a:r>
+            <a:endParaRPr lang="en-US" altLang="ja-JP" sz="2400" dirty="0"/>
+          </a:p>
+        </p:txBody>
+      </p:sp>
+    </p:spTree>
+    <p:extLst>
+      <p:ext uri="{BB962C8B-B14F-4D97-AF65-F5344CB8AC3E}">
+        <p14:creationId xmlns:p14="http://schemas.microsoft.com/office/powerpoint/2010/main" val="1969762399"/>
+      </p:ext>
+    </p:extLst>
+  </p:cSld>
+  <p:clrMapOvr>
+    <a:masterClrMapping/>
+  </p:clrMapOvr>
+</p:sld>
+</file>
+
+<file path=ppt/slides/slide5.xml><?xml version="1.0" encoding="utf-8"?>
+<p:sld xmlns:a="http://schemas.openxmlformats.org/drawingml/2006/main" xmlns:r="http://schemas.openxmlformats.org/officeDocument/2006/relationships" xmlns:p="http://schemas.openxmlformats.org/presentationml/2006/main">
+  <p:cSld>
+    <p:spTree>
+      <p:nvGrpSpPr>
+        <p:cNvPr id="1" name=""/>
+        <p:cNvGrpSpPr/>
+        <p:nvPr/>
+      </p:nvGrpSpPr>
+      <p:grpSpPr>
+        <a:xfrm>
+          <a:off x="0" y="0"/>
+          <a:ext cx="0" cy="0"/>
+          <a:chOff x="0" y="0"/>
+          <a:chExt cx="0" cy="0"/>
+        </a:xfrm>
+      </p:grpSpPr>
+      <p:sp>
+        <p:nvSpPr>
+          <p:cNvPr id="4" name="テキスト ボックス 3">
+            <a:extLst>
+              <a:ext uri="{FF2B5EF4-FFF2-40B4-BE49-F238E27FC236}">
+                <a16:creationId xmlns:a16="http://schemas.microsoft.com/office/drawing/2014/main" id="{5A13BF46-B8C5-48AA-8308-C9ECFF431A18}"/>
+              </a:ext>
+            </a:extLst>
+          </p:cNvPr>
+          <p:cNvSpPr txBox="1"/>
+          <p:nvPr/>
+        </p:nvSpPr>
+        <p:spPr>
+          <a:xfrm>
+            <a:off x="567542" y="491954"/>
+            <a:ext cx="2763898" cy="584775"/>
+          </a:xfrm>
+          <a:prstGeom prst="rect">
+            <a:avLst/>
+          </a:prstGeom>
+          <a:noFill/>
+        </p:spPr>
+        <p:txBody>
+          <a:bodyPr wrap="none" rtlCol="0">
+            <a:spAutoFit/>
+          </a:bodyPr>
+          <a:lstStyle/>
+          <a:p>
+            <a:r>
+              <a:rPr kumimoji="1" lang="ja-JP" altLang="en-US" sz="3200" b="1" u="sng" dirty="0"/>
+              <a:t>卒業研究 環境</a:t>
+            </a:r>
+          </a:p>
+        </p:txBody>
+      </p:sp>
+      <p:sp>
+        <p:nvSpPr>
+          <p:cNvPr id="6" name="テキスト ボックス 5">
+            <a:extLst>
+              <a:ext uri="{FF2B5EF4-FFF2-40B4-BE49-F238E27FC236}">
+                <a16:creationId xmlns:a16="http://schemas.microsoft.com/office/drawing/2014/main" id="{55830AD6-028B-4C4E-80BF-B70DFC1C3A46}"/>
+              </a:ext>
+            </a:extLst>
+          </p:cNvPr>
+          <p:cNvSpPr txBox="1"/>
+          <p:nvPr/>
+        </p:nvSpPr>
+        <p:spPr>
+          <a:xfrm>
+            <a:off x="567542" y="1216429"/>
+            <a:ext cx="8638903" cy="4893647"/>
+          </a:xfrm>
+          <a:prstGeom prst="rect">
+            <a:avLst/>
+          </a:prstGeom>
+          <a:noFill/>
+        </p:spPr>
+        <p:txBody>
+          <a:bodyPr wrap="none" rtlCol="0">
+            <a:spAutoFit/>
+          </a:bodyPr>
+          <a:lstStyle/>
+          <a:p>
+            <a:r>
+              <a:rPr lang="ja-JP" altLang="en-US" sz="2400" dirty="0"/>
+              <a:t>制作環境も自由です。</a:t>
+            </a:r>
+            <a:endParaRPr lang="en-US" altLang="ja-JP" sz="2400" dirty="0"/>
+          </a:p>
+          <a:p>
+            <a:endParaRPr lang="en-US" altLang="ja-JP" sz="2400" dirty="0"/>
+          </a:p>
+          <a:p>
+            <a:r>
+              <a:rPr lang="ja-JP" altLang="en-US" sz="2400" b="1" dirty="0">
+                <a:solidFill>
+                  <a:srgbClr val="FF0000"/>
+                </a:solidFill>
+              </a:rPr>
+              <a:t>・</a:t>
+            </a:r>
+            <a:r>
+              <a:rPr lang="en-US" altLang="ja-JP" sz="2400" b="1" dirty="0">
+                <a:solidFill>
+                  <a:srgbClr val="FF0000"/>
+                </a:solidFill>
+              </a:rPr>
+              <a:t>Unreal Engine</a:t>
+            </a:r>
+            <a:r>
+              <a:rPr lang="ja-JP" altLang="en-US" sz="2400" b="1" dirty="0">
+                <a:solidFill>
+                  <a:srgbClr val="FF0000"/>
+                </a:solidFill>
+              </a:rPr>
+              <a:t>（オススメ！！）</a:t>
+            </a:r>
+            <a:endParaRPr lang="en-US" altLang="ja-JP" sz="2400" b="1" dirty="0">
+              <a:solidFill>
+                <a:srgbClr val="FF0000"/>
+              </a:solidFill>
+            </a:endParaRPr>
+          </a:p>
+          <a:p>
+            <a:r>
+              <a:rPr lang="ja-JP" altLang="en-US" sz="2400" dirty="0"/>
+              <a:t>　機能が豊富で見た目も良く、本格的なゲームが作れます。</a:t>
+            </a:r>
+            <a:endParaRPr lang="en-US" altLang="ja-JP" sz="2400" dirty="0"/>
+          </a:p>
+          <a:p>
+            <a:r>
+              <a:rPr lang="ja-JP" altLang="en-US" sz="2400" dirty="0"/>
+              <a:t>　就職後も見据えて、</a:t>
+            </a:r>
+            <a:r>
+              <a:rPr lang="en-US" altLang="ja-JP" sz="2400" dirty="0"/>
+              <a:t>BP</a:t>
+            </a:r>
+            <a:r>
+              <a:rPr lang="ja-JP" altLang="en-US" sz="2400" dirty="0"/>
+              <a:t>ではなく</a:t>
+            </a:r>
+            <a:r>
+              <a:rPr lang="en-US" altLang="ja-JP" sz="2400" dirty="0"/>
+              <a:t>C++</a:t>
+            </a:r>
+            <a:r>
+              <a:rPr lang="ja-JP" altLang="en-US" sz="2400" dirty="0"/>
+              <a:t>で作りましょう。</a:t>
+            </a:r>
+            <a:endParaRPr lang="en-US" altLang="ja-JP" sz="2400" dirty="0"/>
+          </a:p>
+          <a:p>
+            <a:endParaRPr lang="en-US" altLang="ja-JP" sz="2400" dirty="0"/>
+          </a:p>
+          <a:p>
+            <a:r>
+              <a:rPr lang="ja-JP" altLang="en-US" sz="2400" dirty="0"/>
+              <a:t>・</a:t>
+            </a:r>
+            <a:r>
+              <a:rPr lang="en-US" altLang="ja-JP" sz="2400" dirty="0"/>
+              <a:t>Unity</a:t>
+            </a:r>
+          </a:p>
+          <a:p>
+            <a:r>
+              <a:rPr lang="ja-JP" altLang="en-US" sz="2400" dirty="0"/>
+              <a:t>　使い慣れた手法で作りたい場合はどうぞ。</a:t>
+            </a:r>
+            <a:endParaRPr lang="en-US" altLang="ja-JP" sz="2400" dirty="0"/>
+          </a:p>
+          <a:p>
+            <a:r>
+              <a:rPr lang="ja-JP" altLang="en-US" sz="2400" dirty="0"/>
+              <a:t>　（</a:t>
+            </a:r>
+            <a:r>
+              <a:rPr lang="en-US" altLang="ja-JP" sz="2400" dirty="0"/>
+              <a:t>UE</a:t>
+            </a:r>
+            <a:r>
+              <a:rPr lang="ja-JP" altLang="en-US" sz="2400" dirty="0"/>
+              <a:t>の方がきれいです）</a:t>
+            </a:r>
+            <a:endParaRPr lang="en-US" altLang="ja-JP" sz="2400" dirty="0"/>
+          </a:p>
+          <a:p>
+            <a:endParaRPr lang="en-US" altLang="ja-JP" sz="2400" dirty="0"/>
+          </a:p>
+          <a:p>
+            <a:r>
+              <a:rPr lang="ja-JP" altLang="en-US" sz="2400" dirty="0"/>
+              <a:t>・</a:t>
+            </a:r>
+            <a:r>
+              <a:rPr lang="en-US" altLang="ja-JP" sz="2400" dirty="0" err="1"/>
+              <a:t>DxLib</a:t>
+            </a:r>
+            <a:endParaRPr lang="en-US" altLang="ja-JP" sz="2400" dirty="0"/>
+          </a:p>
+          <a:p>
+            <a:r>
+              <a:rPr lang="ja-JP" altLang="en-US" sz="2400" dirty="0"/>
+              <a:t>　見た目を綺麗にするのが難しい。</a:t>
+            </a:r>
+            <a:endParaRPr lang="en-US" altLang="ja-JP" sz="2400" dirty="0"/>
+          </a:p>
+          <a:p>
+            <a:r>
+              <a:rPr lang="ja-JP" altLang="en-US" sz="2400" dirty="0"/>
+              <a:t>　いっそ</a:t>
+            </a:r>
+            <a:r>
+              <a:rPr lang="en-US" altLang="ja-JP" sz="2400" dirty="0"/>
+              <a:t>DirectX</a:t>
+            </a:r>
+            <a:r>
+              <a:rPr lang="ja-JP" altLang="en-US" sz="2400" dirty="0"/>
+              <a:t>に挑戦してもいいかも。</a:t>
+            </a:r>
+            <a:endParaRPr lang="en-US" altLang="ja-JP" sz="2400" dirty="0"/>
+          </a:p>
+        </p:txBody>
+      </p:sp>
+    </p:spTree>
+    <p:extLst>
+      <p:ext uri="{BB962C8B-B14F-4D97-AF65-F5344CB8AC3E}">
+        <p14:creationId xmlns:p14="http://schemas.microsoft.com/office/powerpoint/2010/main" val="2616699084"/>
       </p:ext>
     </p:extLst>
   </p:cSld>
